--- a/catalog/samples/process_matrix.pptx
+++ b/catalog/samples/process_matrix.pptx
@@ -1372,7 +1372,7 @@
           </a:p>
           <a:p>
             <a:r>
-              <a:t>  "template_sha256": "8de320572600c7190c1218fc9e23d841ce27f7ba4307f6ce57144d20f809d386"</a:t>
+              <a:t>  "template_sha256": "72558d24570a614bea6d90ee1045928b8ce53b23a93cb33942a2193ad589a3b3"</a:t>
             </a:r>
           </a:p>
           <a:p>
